--- a/components/elm/tools/landgen/landgen_flowchart.pptx
+++ b/components/elm/tools/landgen/landgen_flowchart.pptx
@@ -6,6 +6,9 @@
   </p:sldMasterIdLst>
   <p:sldIdLst>
     <p:sldId id="256" r:id="rId7"/>
+    <p:sldId id="257" r:id="rId8"/>
+    <p:sldId id="258" r:id="rId9"/>
+    <p:sldId id="259" r:id="rId10"/>
   </p:sldIdLst>
   <p:sldSz cx="18288000" cy="12801600" type="screen4x3"/>
   <p:notesSz cx="6858000" cy="9144000"/>
@@ -3112,7 +3115,7 @@
           <a:p>
             <a:pPr algn="ctr"/>
             <a:r>
-              <a:rPr sz="2200" b="1">
+              <a:rPr sz="2600" b="1">
                 <a:solidFill>
                   <a:srgbClr val="1F497D"/>
                 </a:solidFill>
@@ -3131,7 +3134,7 @@
         <p:spPr>
           <a:xfrm>
             <a:off x="182880" y="640080"/>
-            <a:ext cx="2011680" cy="274320"/>
+            <a:ext cx="2011680" cy="502920"/>
           </a:xfrm>
           <a:prstGeom prst="roundRect">
             <a:avLst/>
@@ -3165,7 +3168,7 @@
           <a:p>
             <a:pPr algn="ctr"/>
             <a:r>
-              <a:rPr sz="950" b="0">
+              <a:rPr sz="1800" b="0">
                 <a:solidFill>
                   <a:srgbClr val="FFFFFF"/>
                 </a:solidFill>
@@ -3184,7 +3187,7 @@
         <p:spPr>
           <a:xfrm>
             <a:off x="2377440" y="640080"/>
-            <a:ext cx="2011680" cy="274320"/>
+            <a:ext cx="2011680" cy="502920"/>
           </a:xfrm>
           <a:prstGeom prst="roundRect">
             <a:avLst/>
@@ -3218,7 +3221,7 @@
           <a:p>
             <a:pPr algn="ctr"/>
             <a:r>
-              <a:rPr sz="950" b="0">
+              <a:rPr sz="1800" b="0">
                 <a:solidFill>
                   <a:srgbClr val="FFFFFF"/>
                 </a:solidFill>
@@ -3237,7 +3240,7 @@
         <p:spPr>
           <a:xfrm>
             <a:off x="4572000" y="640080"/>
-            <a:ext cx="2011680" cy="274320"/>
+            <a:ext cx="2011680" cy="502920"/>
           </a:xfrm>
           <a:prstGeom prst="roundRect">
             <a:avLst/>
@@ -3271,7 +3274,7 @@
           <a:p>
             <a:pPr algn="ctr"/>
             <a:r>
-              <a:rPr sz="950" b="0">
+              <a:rPr sz="1800" b="0">
                 <a:solidFill>
                   <a:srgbClr val="FFFFFF"/>
                 </a:solidFill>
@@ -3290,7 +3293,7 @@
         <p:spPr>
           <a:xfrm>
             <a:off x="6766559" y="640080"/>
-            <a:ext cx="2011680" cy="274320"/>
+            <a:ext cx="2011680" cy="502920"/>
           </a:xfrm>
           <a:prstGeom prst="roundRect">
             <a:avLst/>
@@ -3324,7 +3327,7 @@
           <a:p>
             <a:pPr algn="ctr"/>
             <a:r>
-              <a:rPr sz="950" b="0">
+              <a:rPr sz="1800" b="0">
                 <a:solidFill>
                   <a:srgbClr val="FFFFFF"/>
                 </a:solidFill>
@@ -3343,7 +3346,7 @@
         <p:spPr>
           <a:xfrm>
             <a:off x="8961120" y="640080"/>
-            <a:ext cx="2011680" cy="274320"/>
+            <a:ext cx="2011680" cy="502920"/>
           </a:xfrm>
           <a:prstGeom prst="roundRect">
             <a:avLst/>
@@ -3377,7 +3380,7 @@
           <a:p>
             <a:pPr algn="ctr"/>
             <a:r>
-              <a:rPr sz="950" b="0">
+              <a:rPr sz="1800" b="0">
                 <a:solidFill>
                   <a:srgbClr val="FFFFFF"/>
                 </a:solidFill>
@@ -3396,7 +3399,7 @@
         <p:spPr>
           <a:xfrm>
             <a:off x="11155680" y="640080"/>
-            <a:ext cx="2011680" cy="274320"/>
+            <a:ext cx="2011680" cy="502920"/>
           </a:xfrm>
           <a:prstGeom prst="roundRect">
             <a:avLst/>
@@ -3430,7 +3433,7 @@
           <a:p>
             <a:pPr algn="ctr"/>
             <a:r>
-              <a:rPr sz="950" b="0">
+              <a:rPr sz="1800" b="0">
                 <a:solidFill>
                   <a:srgbClr val="FFFFFF"/>
                 </a:solidFill>
@@ -3449,7 +3452,7 @@
         <p:spPr>
           <a:xfrm>
             <a:off x="13350239" y="640080"/>
-            <a:ext cx="2011680" cy="274320"/>
+            <a:ext cx="2011680" cy="502920"/>
           </a:xfrm>
           <a:prstGeom prst="roundRect">
             <a:avLst/>
@@ -3483,7 +3486,7 @@
           <a:p>
             <a:pPr algn="ctr"/>
             <a:r>
-              <a:rPr sz="950" b="0">
+              <a:rPr sz="1800" b="0">
                 <a:solidFill>
                   <a:srgbClr val="FFFFFF"/>
                 </a:solidFill>
@@ -3502,7 +3505,7 @@
         <p:spPr>
           <a:xfrm>
             <a:off x="15544800" y="640080"/>
-            <a:ext cx="2011680" cy="274320"/>
+            <a:ext cx="2011680" cy="502920"/>
           </a:xfrm>
           <a:prstGeom prst="roundRect">
             <a:avLst/>
@@ -3536,7 +3539,7 @@
           <a:p>
             <a:pPr algn="ctr"/>
             <a:r>
-              <a:rPr sz="950" b="0">
+              <a:rPr sz="1800" b="0">
                 <a:solidFill>
                   <a:srgbClr val="FFFFFF"/>
                 </a:solidFill>
@@ -3554,8 +3557,8 @@
         </p:nvSpPr>
         <p:spPr>
           <a:xfrm>
-            <a:off x="8321040" y="1097280"/>
-            <a:ext cx="2560320" cy="411480"/>
+            <a:off x="7223760" y="1371600"/>
+            <a:ext cx="3931920" cy="868680"/>
           </a:xfrm>
           <a:prstGeom prst="roundRect">
             <a:avLst/>
@@ -3589,7 +3592,7 @@
           <a:p>
             <a:pPr algn="ctr"/>
             <a:r>
-              <a:rPr sz="1000" b="1">
+              <a:rPr sz="1800" b="1">
                 <a:solidFill>
                   <a:srgbClr val="FFFFFF"/>
                 </a:solidFill>
@@ -3608,8 +3611,8 @@
         </p:nvSpPr>
         <p:spPr>
           <a:xfrm>
-            <a:off x="11887200" y="1097280"/>
-            <a:ext cx="2011680" cy="411480"/>
+            <a:off x="12161520" y="1371600"/>
+            <a:ext cx="2834640" cy="868680"/>
           </a:xfrm>
           <a:prstGeom prst="roundRect">
             <a:avLst/>
@@ -3643,7 +3646,7 @@
           <a:p>
             <a:pPr algn="ctr"/>
             <a:r>
-              <a:rPr sz="1000" b="0">
+              <a:rPr sz="1800" b="0">
                 <a:solidFill>
                   <a:srgbClr val="FFFFFF"/>
                 </a:solidFill>
@@ -3662,7 +3665,7 @@
         </p:nvCxnSpPr>
         <p:spPr>
           <a:xfrm flipH="1">
-            <a:off x="10881360" y="1303020"/>
+            <a:off x="11155680" y="1805940"/>
             <a:ext cx="1005840" cy="1"/>
           </a:xfrm>
           <a:prstGeom prst="line">
@@ -3678,47 +3681,14 @@
       </p:cxnSp>
       <p:sp>
         <p:nvSpPr>
-          <p:cNvPr id="14" name="TextBox 13"/>
-          <p:cNvSpPr txBox="1"/>
-          <p:nvPr/>
-        </p:nvSpPr>
-        <p:spPr>
-          <a:xfrm>
-            <a:off x="11384280" y="1193292"/>
-            <a:ext cx="822960" cy="182880"/>
-          </a:xfrm>
-          <a:prstGeom prst="rect">
-            <a:avLst/>
-          </a:prstGeom>
-          <a:noFill/>
-        </p:spPr>
-        <p:txBody>
-          <a:bodyPr wrap="none">
-            <a:spAutoFit/>
-          </a:bodyPr>
-          <a:lstStyle/>
-          <a:p>
-            <a:r>
-              <a:rPr sz="900">
-                <a:solidFill>
-                  <a:srgbClr val="404040"/>
-                </a:solidFill>
-              </a:rPr>
-              <a:t>reads</a:t>
-            </a:r>
-          </a:p>
-        </p:txBody>
-      </p:sp>
-      <p:sp>
-        <p:nvSpPr>
-          <p:cNvPr id="15" name="Rounded Rectangle 14"/>
+          <p:cNvPr id="14" name="Rounded Rectangle 13"/>
           <p:cNvSpPr/>
           <p:nvPr/>
         </p:nvSpPr>
         <p:spPr>
           <a:xfrm>
-            <a:off x="7863840" y="2011680"/>
-            <a:ext cx="3474720" cy="411480"/>
+            <a:off x="6675120" y="2834640"/>
+            <a:ext cx="4754880" cy="1463040"/>
           </a:xfrm>
           <a:prstGeom prst="roundRect">
             <a:avLst/>
@@ -3752,7 +3722,7 @@
           <a:p>
             <a:pPr algn="ctr"/>
             <a:r>
-              <a:rPr sz="1000" b="1">
+              <a:rPr sz="1800" b="1">
                 <a:solidFill>
                   <a:srgbClr val="FFFFFF"/>
                 </a:solidFill>
@@ -3766,14 +3736,14 @@
       </p:sp>
       <p:cxnSp>
         <p:nvCxnSpPr>
-          <p:cNvPr id="16" name="Arrow 16"/>
+          <p:cNvPr id="15" name="Arrow 15"/>
           <p:cNvCxnSpPr/>
           <p:nvPr/>
         </p:nvCxnSpPr>
         <p:spPr>
-          <a:xfrm>
-            <a:off x="9601200" y="1508760"/>
-            <a:ext cx="1" cy="502920"/>
+          <a:xfrm flipH="1">
+            <a:off x="9052560" y="2240280"/>
+            <a:ext cx="137160" cy="594360"/>
           </a:xfrm>
           <a:prstGeom prst="line">
             <a:avLst/>
@@ -3788,14 +3758,14 @@
       </p:cxnSp>
       <p:sp>
         <p:nvSpPr>
-          <p:cNvPr id="17" name="Rounded Rectangle 16"/>
+          <p:cNvPr id="16" name="Rounded Rectangle 15"/>
           <p:cNvSpPr/>
           <p:nvPr/>
         </p:nvSpPr>
         <p:spPr>
           <a:xfrm>
-            <a:off x="12618720" y="2011680"/>
-            <a:ext cx="5303520" cy="1234440"/>
+            <a:off x="11887200" y="2834640"/>
+            <a:ext cx="6035040" cy="1965960"/>
           </a:xfrm>
           <a:prstGeom prst="roundRect">
             <a:avLst/>
@@ -3829,7 +3799,7 @@
           <a:p>
             <a:pPr algn="ctr"/>
             <a:r>
-              <a:rPr sz="800" b="0">
+              <a:rPr sz="1800" b="0">
                 <a:solidFill>
                   <a:srgbClr val="FFFFFF"/>
                 </a:solidFill>
@@ -3844,14 +3814,14 @@
       </p:sp>
       <p:cxnSp>
         <p:nvCxnSpPr>
-          <p:cNvPr id="18" name="Arrow 18"/>
+          <p:cNvPr id="17" name="Arrow 17"/>
           <p:cNvCxnSpPr/>
           <p:nvPr/>
         </p:nvCxnSpPr>
         <p:spPr>
           <a:xfrm>
-            <a:off x="11338560" y="2217420"/>
-            <a:ext cx="1280160" cy="411480"/>
+            <a:off x="11430000" y="3566160"/>
+            <a:ext cx="457200" cy="251460"/>
           </a:xfrm>
           <a:prstGeom prst="line">
             <a:avLst/>
@@ -3866,47 +3836,14 @@
       </p:cxnSp>
       <p:sp>
         <p:nvSpPr>
-          <p:cNvPr id="19" name="TextBox 18"/>
-          <p:cNvSpPr txBox="1"/>
-          <p:nvPr/>
-        </p:nvSpPr>
-        <p:spPr>
-          <a:xfrm>
-            <a:off x="11978640" y="2313432"/>
-            <a:ext cx="822960" cy="182880"/>
-          </a:xfrm>
-          <a:prstGeom prst="rect">
-            <a:avLst/>
-          </a:prstGeom>
-          <a:noFill/>
-        </p:spPr>
-        <p:txBody>
-          <a:bodyPr wrap="none">
-            <a:spAutoFit/>
-          </a:bodyPr>
-          <a:lstStyle/>
-          <a:p>
-            <a:r>
-              <a:rPr sz="900">
-                <a:solidFill>
-                  <a:srgbClr val="404040"/>
-                </a:solidFill>
-              </a:rPr>
-              <a:t>uses</a:t>
-            </a:r>
-          </a:p>
-        </p:txBody>
-      </p:sp>
-      <p:sp>
-        <p:nvSpPr>
-          <p:cNvPr id="20" name="Rounded Rectangle 19"/>
+          <p:cNvPr id="18" name="Rounded Rectangle 17"/>
           <p:cNvSpPr/>
           <p:nvPr/>
         </p:nvSpPr>
         <p:spPr>
           <a:xfrm>
-            <a:off x="731520" y="3794760"/>
-            <a:ext cx="3108960" cy="777240"/>
+            <a:off x="274320" y="5669280"/>
+            <a:ext cx="3291840" cy="1143000"/>
           </a:xfrm>
           <a:prstGeom prst="roundRect">
             <a:avLst/>
@@ -3940,7 +3877,7 @@
           <a:p>
             <a:pPr algn="ctr"/>
             <a:r>
-              <a:rPr sz="1000" b="0">
+              <a:rPr sz="1800" b="0">
                 <a:solidFill>
                   <a:srgbClr val="FFFFFF"/>
                 </a:solidFill>
@@ -3955,14 +3892,14 @@
       </p:sp>
       <p:cxnSp>
         <p:nvCxnSpPr>
-          <p:cNvPr id="21" name="Arrow 21"/>
+          <p:cNvPr id="19" name="Arrow 19"/>
           <p:cNvCxnSpPr/>
           <p:nvPr/>
         </p:nvCxnSpPr>
         <p:spPr>
           <a:xfrm flipH="1">
-            <a:off x="2286000" y="2423160"/>
-            <a:ext cx="7315200" cy="1371600"/>
+            <a:off x="1920240" y="4297680"/>
+            <a:ext cx="7132320" cy="1371600"/>
           </a:xfrm>
           <a:prstGeom prst="line">
             <a:avLst/>
@@ -3977,14 +3914,14 @@
       </p:cxnSp>
       <p:sp>
         <p:nvSpPr>
-          <p:cNvPr id="22" name="Rounded Rectangle 21"/>
+          <p:cNvPr id="20" name="Rounded Rectangle 19"/>
           <p:cNvSpPr/>
           <p:nvPr/>
         </p:nvSpPr>
         <p:spPr>
           <a:xfrm>
-            <a:off x="4160520" y="3794760"/>
-            <a:ext cx="3108960" cy="777240"/>
+            <a:off x="3886200" y="5669280"/>
+            <a:ext cx="3291840" cy="1143000"/>
           </a:xfrm>
           <a:prstGeom prst="roundRect">
             <a:avLst/>
@@ -4018,7 +3955,7 @@
           <a:p>
             <a:pPr algn="ctr"/>
             <a:r>
-              <a:rPr sz="1000" b="0">
+              <a:rPr sz="1800" b="0">
                 <a:solidFill>
                   <a:srgbClr val="FFFFFF"/>
                 </a:solidFill>
@@ -4033,14 +3970,14 @@
       </p:sp>
       <p:cxnSp>
         <p:nvCxnSpPr>
-          <p:cNvPr id="23" name="Arrow 23"/>
+          <p:cNvPr id="21" name="Arrow 21"/>
           <p:cNvCxnSpPr/>
           <p:nvPr/>
         </p:nvCxnSpPr>
         <p:spPr>
           <a:xfrm flipH="1">
-            <a:off x="5715000" y="2423160"/>
-            <a:ext cx="3886200" cy="1371600"/>
+            <a:off x="5532120" y="4297680"/>
+            <a:ext cx="3520440" cy="1371600"/>
           </a:xfrm>
           <a:prstGeom prst="line">
             <a:avLst/>
@@ -4055,14 +3992,14 @@
       </p:cxnSp>
       <p:sp>
         <p:nvSpPr>
-          <p:cNvPr id="24" name="Rounded Rectangle 23"/>
+          <p:cNvPr id="22" name="Rounded Rectangle 21"/>
           <p:cNvSpPr/>
           <p:nvPr/>
         </p:nvSpPr>
         <p:spPr>
           <a:xfrm>
-            <a:off x="7589520" y="3794760"/>
-            <a:ext cx="3108960" cy="777240"/>
+            <a:off x="7498080" y="5669280"/>
+            <a:ext cx="3291840" cy="1143000"/>
           </a:xfrm>
           <a:prstGeom prst="roundRect">
             <a:avLst/>
@@ -4096,29 +4033,27 @@
           <a:p>
             <a:pPr algn="ctr"/>
             <a:r>
-              <a:rPr sz="1000" b="0">
+              <a:rPr sz="1800" b="0">
                 <a:solidFill>
                   <a:srgbClr val="FFFFFF"/>
                 </a:solidFill>
               </a:rPr>
-              <a:t>atmosphere.py
-run()
-[ndep, pdep,
-lightning]</a:t>
+              <a:t>soil.py
+run()</a:t>
             </a:r>
           </a:p>
         </p:txBody>
       </p:sp>
       <p:cxnSp>
         <p:nvCxnSpPr>
-          <p:cNvPr id="25" name="Arrow 25"/>
+          <p:cNvPr id="23" name="Arrow 23"/>
           <p:cNvCxnSpPr/>
           <p:nvPr/>
         </p:nvCxnSpPr>
         <p:spPr>
-          <a:xfrm flipH="1">
-            <a:off x="9144000" y="2423160"/>
-            <a:ext cx="457200" cy="1371600"/>
+          <a:xfrm>
+            <a:off x="9052560" y="4297680"/>
+            <a:ext cx="91440" cy="1371600"/>
           </a:xfrm>
           <a:prstGeom prst="line">
             <a:avLst/>
@@ -4133,14 +4068,14 @@
       </p:cxnSp>
       <p:sp>
         <p:nvSpPr>
-          <p:cNvPr id="26" name="Rounded Rectangle 25"/>
+          <p:cNvPr id="24" name="Rounded Rectangle 23"/>
           <p:cNvSpPr/>
           <p:nvPr/>
         </p:nvSpPr>
         <p:spPr>
           <a:xfrm>
-            <a:off x="11018520" y="3794760"/>
-            <a:ext cx="3108960" cy="777240"/>
+            <a:off x="11109960" y="5669280"/>
+            <a:ext cx="3291840" cy="1143000"/>
           </a:xfrm>
           <a:prstGeom prst="roundRect">
             <a:avLst/>
@@ -4174,29 +4109,27 @@
           <a:p>
             <a:pPr algn="ctr"/>
             <a:r>
-              <a:rPr sz="1000" b="0">
+              <a:rPr sz="1800" b="0">
                 <a:solidFill>
                   <a:srgbClr val="FFFFFF"/>
                 </a:solidFill>
               </a:rPr>
-              <a:t>soil.py
-run()
-[soil texture,
-organic matter]</a:t>
+              <a:t>human.py
+run()</a:t>
             </a:r>
           </a:p>
         </p:txBody>
       </p:sp>
       <p:cxnSp>
         <p:nvCxnSpPr>
-          <p:cNvPr id="27" name="Arrow 27"/>
+          <p:cNvPr id="25" name="Arrow 25"/>
           <p:cNvCxnSpPr/>
           <p:nvPr/>
         </p:nvCxnSpPr>
         <p:spPr>
           <a:xfrm>
-            <a:off x="9601200" y="2423160"/>
-            <a:ext cx="2971800" cy="1371600"/>
+            <a:off x="9052560" y="4297680"/>
+            <a:ext cx="3703320" cy="1371600"/>
           </a:xfrm>
           <a:prstGeom prst="line">
             <a:avLst/>
@@ -4211,14 +4144,14 @@
       </p:cxnSp>
       <p:sp>
         <p:nvSpPr>
-          <p:cNvPr id="28" name="Rounded Rectangle 27"/>
+          <p:cNvPr id="26" name="Rounded Rectangle 25"/>
           <p:cNvSpPr/>
           <p:nvPr/>
         </p:nvSpPr>
         <p:spPr>
           <a:xfrm>
-            <a:off x="14447520" y="3794760"/>
-            <a:ext cx="3108960" cy="777240"/>
+            <a:off x="14721840" y="5669280"/>
+            <a:ext cx="3291840" cy="1143000"/>
           </a:xfrm>
           <a:prstGeom prst="roundRect">
             <a:avLst/>
@@ -4252,29 +4185,27 @@
           <a:p>
             <a:pPr algn="ctr"/>
             <a:r>
-              <a:rPr sz="1000" b="0">
+              <a:rPr sz="1800" b="0">
                 <a:solidFill>
                   <a:srgbClr val="FFFFFF"/>
                 </a:solidFill>
               </a:rPr>
-              <a:t>human.py
-run()
-[population,
-GDP]</a:t>
+              <a:t>atmosphere.py
+run()</a:t>
             </a:r>
           </a:p>
         </p:txBody>
       </p:sp>
       <p:cxnSp>
         <p:nvCxnSpPr>
-          <p:cNvPr id="29" name="Arrow 29"/>
+          <p:cNvPr id="27" name="Arrow 27"/>
           <p:cNvCxnSpPr/>
           <p:nvPr/>
         </p:nvCxnSpPr>
         <p:spPr>
           <a:xfrm>
-            <a:off x="9601200" y="2423160"/>
-            <a:ext cx="6400800" cy="1371600"/>
+            <a:off x="9052560" y="4297680"/>
+            <a:ext cx="7315200" cy="1371600"/>
           </a:xfrm>
           <a:prstGeom prst="line">
             <a:avLst/>
@@ -4289,14 +4220,14 @@
       </p:cxnSp>
       <p:sp>
         <p:nvSpPr>
-          <p:cNvPr id="30" name="Rounded Rectangle 29"/>
+          <p:cNvPr id="28" name="Rounded Rectangle 27"/>
           <p:cNvSpPr/>
           <p:nvPr/>
         </p:nvSpPr>
         <p:spPr>
           <a:xfrm>
-            <a:off x="4160520" y="5074920"/>
-            <a:ext cx="3108960" cy="411480"/>
+            <a:off x="3886200" y="7543800"/>
+            <a:ext cx="3108960" cy="822960"/>
           </a:xfrm>
           <a:prstGeom prst="roundRect">
             <a:avLst/>
@@ -4330,7 +4261,7 @@
           <a:p>
             <a:pPr algn="ctr"/>
             <a:r>
-              <a:rPr sz="1000" b="0">
+              <a:rPr sz="1800" b="0">
                 <a:solidFill>
                   <a:srgbClr val="FFFFFF"/>
                 </a:solidFill>
@@ -4343,14 +4274,14 @@
       </p:sp>
       <p:cxnSp>
         <p:nvCxnSpPr>
-          <p:cNvPr id="31" name="Arrow 31"/>
+          <p:cNvPr id="29" name="Arrow 29"/>
           <p:cNvCxnSpPr/>
           <p:nvPr/>
         </p:nvCxnSpPr>
         <p:spPr>
           <a:xfrm>
-            <a:off x="5715000" y="4572000"/>
-            <a:ext cx="1" cy="502920"/>
+            <a:off x="5440680" y="6812280"/>
+            <a:ext cx="1" cy="731520"/>
           </a:xfrm>
           <a:prstGeom prst="line">
             <a:avLst/>
@@ -4365,14 +4296,14 @@
       </p:cxnSp>
       <p:sp>
         <p:nvSpPr>
-          <p:cNvPr id="32" name="Rounded Rectangle 31"/>
+          <p:cNvPr id="30" name="Rounded Rectangle 29"/>
           <p:cNvSpPr/>
           <p:nvPr/>
         </p:nvSpPr>
         <p:spPr>
           <a:xfrm>
-            <a:off x="256032" y="5897880"/>
-            <a:ext cx="1828800" cy="685800"/>
+            <a:off x="2253999" y="9098280"/>
+            <a:ext cx="1874519" cy="914400"/>
           </a:xfrm>
           <a:prstGeom prst="roundRect">
             <a:avLst/>
@@ -4406,28 +4337,27 @@
           <a:p>
             <a:pPr algn="ctr"/>
             <a:r>
-              <a:rPr sz="950" b="0">
+              <a:rPr sz="1800" b="0">
                 <a:solidFill>
                   <a:srgbClr val="FFFFFF"/>
                 </a:solidFill>
               </a:rPr>
               <a:t>landcover.py
-run() → landcover_
-process() [parallel]</a:t>
+run() [parallel]</a:t>
             </a:r>
           </a:p>
         </p:txBody>
       </p:sp>
       <p:cxnSp>
         <p:nvCxnSpPr>
-          <p:cNvPr id="33" name="Arrow 33"/>
+          <p:cNvPr id="31" name="Arrow 31"/>
           <p:cNvCxnSpPr/>
           <p:nvPr/>
         </p:nvCxnSpPr>
         <p:spPr>
           <a:xfrm flipH="1">
-            <a:off x="1170432" y="5486400"/>
-            <a:ext cx="4544568" cy="411480"/>
+            <a:off x="3191259" y="8366760"/>
+            <a:ext cx="2249421" cy="731520"/>
           </a:xfrm>
           <a:prstGeom prst="line">
             <a:avLst/>
@@ -4442,14 +4372,14 @@
       </p:cxnSp>
       <p:sp>
         <p:nvSpPr>
-          <p:cNvPr id="34" name="Rounded Rectangle 33"/>
+          <p:cNvPr id="32" name="Rounded Rectangle 31"/>
           <p:cNvSpPr/>
           <p:nvPr/>
         </p:nvSpPr>
         <p:spPr>
           <a:xfrm>
-            <a:off x="2249424" y="5897880"/>
-            <a:ext cx="1828800" cy="685800"/>
+            <a:off x="4238246" y="9098280"/>
+            <a:ext cx="1874519" cy="914400"/>
           </a:xfrm>
           <a:prstGeom prst="roundRect">
             <a:avLst/>
@@ -4483,7 +4413,7 @@
           <a:p>
             <a:pPr algn="ctr"/>
             <a:r>
-              <a:rPr sz="950" b="0">
+              <a:rPr sz="1800" b="0">
                 <a:solidFill>
                   <a:srgbClr val="FFFFFF"/>
                 </a:solidFill>
@@ -4497,14 +4427,14 @@
       </p:sp>
       <p:cxnSp>
         <p:nvCxnSpPr>
-          <p:cNvPr id="35" name="Arrow 35"/>
+          <p:cNvPr id="33" name="Arrow 33"/>
           <p:cNvCxnSpPr/>
           <p:nvPr/>
         </p:nvCxnSpPr>
         <p:spPr>
           <a:xfrm flipH="1">
-            <a:off x="3163824" y="5486400"/>
-            <a:ext cx="2551176" cy="411480"/>
+            <a:off x="5175506" y="8366760"/>
+            <a:ext cx="265174" cy="731520"/>
           </a:xfrm>
           <a:prstGeom prst="line">
             <a:avLst/>
@@ -4519,14 +4449,14 @@
       </p:cxnSp>
       <p:sp>
         <p:nvSpPr>
-          <p:cNvPr id="36" name="Rounded Rectangle 35"/>
+          <p:cNvPr id="34" name="Rounded Rectangle 33"/>
           <p:cNvSpPr/>
           <p:nvPr/>
         </p:nvSpPr>
         <p:spPr>
           <a:xfrm>
-            <a:off x="4242816" y="5897880"/>
-            <a:ext cx="1828800" cy="685800"/>
+            <a:off x="6222493" y="9098280"/>
+            <a:ext cx="1874519" cy="914400"/>
           </a:xfrm>
           <a:prstGeom prst="roundRect">
             <a:avLst/>
@@ -4560,7 +4490,7 @@
           <a:p>
             <a:pPr algn="ctr"/>
             <a:r>
-              <a:rPr sz="950" b="0">
+              <a:rPr sz="1800" b="0">
                 <a:solidFill>
                   <a:srgbClr val="FFFFFF"/>
                 </a:solidFill>
@@ -4574,14 +4504,14 @@
       </p:sp>
       <p:cxnSp>
         <p:nvCxnSpPr>
-          <p:cNvPr id="37" name="Arrow 37"/>
+          <p:cNvPr id="35" name="Arrow 35"/>
           <p:cNvCxnSpPr/>
           <p:nvPr/>
         </p:nvCxnSpPr>
         <p:spPr>
-          <a:xfrm flipH="1">
-            <a:off x="5157216" y="5486400"/>
-            <a:ext cx="557784" cy="411480"/>
+          <a:xfrm>
+            <a:off x="5440680" y="8366760"/>
+            <a:ext cx="1719073" cy="731520"/>
           </a:xfrm>
           <a:prstGeom prst="line">
             <a:avLst/>
@@ -4596,14 +4526,14 @@
       </p:cxnSp>
       <p:sp>
         <p:nvSpPr>
-          <p:cNvPr id="38" name="Rounded Rectangle 37"/>
+          <p:cNvPr id="36" name="Rounded Rectangle 35"/>
           <p:cNvSpPr/>
           <p:nvPr/>
         </p:nvSpPr>
         <p:spPr>
           <a:xfrm>
-            <a:off x="6236208" y="5897880"/>
-            <a:ext cx="1828800" cy="685800"/>
+            <a:off x="8206740" y="9098280"/>
+            <a:ext cx="1874519" cy="914400"/>
           </a:xfrm>
           <a:prstGeom prst="roundRect">
             <a:avLst/>
@@ -4637,7 +4567,7 @@
           <a:p>
             <a:pPr algn="ctr"/>
             <a:r>
-              <a:rPr sz="950" b="0">
+              <a:rPr sz="1800" b="0">
                 <a:solidFill>
                   <a:srgbClr val="FFFFFF"/>
                 </a:solidFill>
@@ -4651,14 +4581,14 @@
       </p:sp>
       <p:cxnSp>
         <p:nvCxnSpPr>
-          <p:cNvPr id="39" name="Arrow 39"/>
+          <p:cNvPr id="37" name="Arrow 37"/>
           <p:cNvCxnSpPr/>
           <p:nvPr/>
         </p:nvCxnSpPr>
         <p:spPr>
           <a:xfrm>
-            <a:off x="5715000" y="5486400"/>
-            <a:ext cx="1435608" cy="411480"/>
+            <a:off x="5440680" y="8366760"/>
+            <a:ext cx="3703320" cy="731520"/>
           </a:xfrm>
           <a:prstGeom prst="line">
             <a:avLst/>
@@ -4673,14 +4603,14 @@
       </p:cxnSp>
       <p:sp>
         <p:nvSpPr>
-          <p:cNvPr id="40" name="Rounded Rectangle 39"/>
+          <p:cNvPr id="38" name="Rounded Rectangle 37"/>
           <p:cNvSpPr/>
           <p:nvPr/>
         </p:nvSpPr>
         <p:spPr>
           <a:xfrm>
-            <a:off x="8229600" y="5897880"/>
-            <a:ext cx="1828800" cy="685800"/>
+            <a:off x="10190987" y="9098280"/>
+            <a:ext cx="1874519" cy="914400"/>
           </a:xfrm>
           <a:prstGeom prst="roundRect">
             <a:avLst/>
@@ -4714,7 +4644,7 @@
           <a:p>
             <a:pPr algn="ctr"/>
             <a:r>
-              <a:rPr sz="950" b="0">
+              <a:rPr sz="1800" b="0">
                 <a:solidFill>
                   <a:srgbClr val="FFFFFF"/>
                 </a:solidFill>
@@ -4728,14 +4658,14 @@
       </p:sp>
       <p:cxnSp>
         <p:nvCxnSpPr>
-          <p:cNvPr id="41" name="Arrow 41"/>
+          <p:cNvPr id="39" name="Arrow 39"/>
           <p:cNvCxnSpPr/>
           <p:nvPr/>
         </p:nvCxnSpPr>
         <p:spPr>
           <a:xfrm>
-            <a:off x="5715000" y="5486400"/>
-            <a:ext cx="3429000" cy="411480"/>
+            <a:off x="5440680" y="8366760"/>
+            <a:ext cx="5687567" cy="731520"/>
           </a:xfrm>
           <a:prstGeom prst="line">
             <a:avLst/>
@@ -4750,14 +4680,14 @@
       </p:cxnSp>
       <p:sp>
         <p:nvSpPr>
-          <p:cNvPr id="42" name="Rounded Rectangle 41"/>
+          <p:cNvPr id="40" name="Rounded Rectangle 39"/>
           <p:cNvSpPr/>
           <p:nvPr/>
         </p:nvSpPr>
         <p:spPr>
           <a:xfrm>
-            <a:off x="10222992" y="5897880"/>
-            <a:ext cx="1828800" cy="685800"/>
+            <a:off x="12175234" y="9098280"/>
+            <a:ext cx="1874519" cy="914400"/>
           </a:xfrm>
           <a:prstGeom prst="roundRect">
             <a:avLst/>
@@ -4791,28 +4721,27 @@
           <a:p>
             <a:pPr algn="ctr"/>
             <a:r>
-              <a:rPr sz="950" b="0">
+              <a:rPr sz="1800" b="0">
                 <a:solidFill>
                   <a:srgbClr val="FFFFFF"/>
                 </a:solidFill>
               </a:rPr>
               <a:t>harvest.py
-run() → harvest_
-process() [parallel]</a:t>
+run() [parallel]</a:t>
             </a:r>
           </a:p>
         </p:txBody>
       </p:sp>
       <p:cxnSp>
         <p:nvCxnSpPr>
-          <p:cNvPr id="43" name="Arrow 43"/>
+          <p:cNvPr id="41" name="Arrow 41"/>
           <p:cNvCxnSpPr/>
           <p:nvPr/>
         </p:nvCxnSpPr>
         <p:spPr>
           <a:xfrm>
-            <a:off x="5715000" y="5486400"/>
-            <a:ext cx="5422392" cy="411480"/>
+            <a:off x="5440680" y="8366760"/>
+            <a:ext cx="7671814" cy="731520"/>
           </a:xfrm>
           <a:prstGeom prst="line">
             <a:avLst/>
@@ -4827,14 +4756,14 @@
       </p:cxnSp>
       <p:sp>
         <p:nvSpPr>
-          <p:cNvPr id="44" name="Rounded Rectangle 43"/>
+          <p:cNvPr id="42" name="Rounded Rectangle 41"/>
           <p:cNvSpPr/>
           <p:nvPr/>
         </p:nvSpPr>
         <p:spPr>
           <a:xfrm>
-            <a:off x="12216384" y="5897880"/>
-            <a:ext cx="1828800" cy="685800"/>
+            <a:off x="14159481" y="9098280"/>
+            <a:ext cx="1874519" cy="914400"/>
           </a:xfrm>
           <a:prstGeom prst="roundRect">
             <a:avLst/>
@@ -4868,84 +4797,7 @@
           <a:p>
             <a:pPr algn="ctr"/>
             <a:r>
-              <a:rPr sz="950" b="0">
-                <a:solidFill>
-                  <a:srgbClr val="FFFFFF"/>
-                </a:solidFill>
-              </a:rPr>
-              <a:t>normalize_cell
-fill_land +
-reconcile_ocean</a:t>
-            </a:r>
-          </a:p>
-        </p:txBody>
-      </p:sp>
-      <p:cxnSp>
-        <p:nvCxnSpPr>
-          <p:cNvPr id="45" name="Arrow 45"/>
-          <p:cNvCxnSpPr/>
-          <p:nvPr/>
-        </p:nvCxnSpPr>
-        <p:spPr>
-          <a:xfrm>
-            <a:off x="5715000" y="5486400"/>
-            <a:ext cx="7415784" cy="411480"/>
-          </a:xfrm>
-          <a:prstGeom prst="line">
-            <a:avLst/>
-          </a:prstGeom>
-          <a:ln w="19050">
-            <a:solidFill>
-              <a:srgbClr val="404040"/>
-            </a:solidFill>
-            <a:tailEnd type="arrow" w="med" len="med"/>
-          </a:ln>
-        </p:spPr>
-      </p:cxnSp>
-      <p:sp>
-        <p:nvSpPr>
-          <p:cNvPr id="46" name="Rounded Rectangle 45"/>
-          <p:cNvSpPr/>
-          <p:nvPr/>
-        </p:nvSpPr>
-        <p:spPr>
-          <a:xfrm>
-            <a:off x="14209776" y="5897880"/>
-            <a:ext cx="1828800" cy="685800"/>
-          </a:xfrm>
-          <a:prstGeom prst="roundRect">
-            <a:avLst/>
-          </a:prstGeom>
-          <a:solidFill>
-            <a:srgbClr val="A5A5A5"/>
-          </a:solidFill>
-          <a:ln w="9525">
-            <a:solidFill>
-              <a:srgbClr val="FFFFFF"/>
-            </a:solidFill>
-          </a:ln>
-        </p:spPr>
-        <p:style>
-          <a:lnRef idx="1">
-            <a:schemeClr val="accent1"/>
-          </a:lnRef>
-          <a:fillRef idx="3">
-            <a:schemeClr val="accent1"/>
-          </a:fillRef>
-          <a:effectRef idx="2">
-            <a:schemeClr val="accent1"/>
-          </a:effectRef>
-          <a:fontRef idx="minor">
-            <a:schemeClr val="lt1"/>
-          </a:fontRef>
-        </p:style>
-        <p:txBody>
-          <a:bodyPr rtlCol="0" anchor="ctr" wrap="square"/>
-          <a:lstStyle/>
-          <a:p>
-            <a:pPr algn="ctr"/>
-            <a:r>
-              <a:rPr sz="950" b="0">
+              <a:rPr sz="1800" b="0">
                 <a:solidFill>
                   <a:srgbClr val="FFFFFF"/>
                 </a:solidFill>
@@ -4959,14 +4811,14 @@
       </p:sp>
       <p:cxnSp>
         <p:nvCxnSpPr>
-          <p:cNvPr id="47" name="Arrow 47"/>
+          <p:cNvPr id="43" name="Arrow 43"/>
           <p:cNvCxnSpPr/>
           <p:nvPr/>
         </p:nvCxnSpPr>
         <p:spPr>
           <a:xfrm>
-            <a:off x="5715000" y="5486400"/>
-            <a:ext cx="9409176" cy="411480"/>
+            <a:off x="5440680" y="8366760"/>
+            <a:ext cx="9656061" cy="731520"/>
           </a:xfrm>
           <a:prstGeom prst="line">
             <a:avLst/>
@@ -4981,91 +4833,14 @@
       </p:cxnSp>
       <p:sp>
         <p:nvSpPr>
-          <p:cNvPr id="48" name="Rounded Rectangle 47"/>
+          <p:cNvPr id="44" name="Rounded Rectangle 43"/>
           <p:cNvSpPr/>
           <p:nvPr/>
         </p:nvSpPr>
         <p:spPr>
           <a:xfrm>
-            <a:off x="16203168" y="5897880"/>
-            <a:ext cx="1828800" cy="685800"/>
-          </a:xfrm>
-          <a:prstGeom prst="roundRect">
-            <a:avLst/>
-          </a:prstGeom>
-          <a:solidFill>
-            <a:srgbClr val="A5A5A5"/>
-          </a:solidFill>
-          <a:ln w="9525">
-            <a:solidFill>
-              <a:srgbClr val="FFFFFF"/>
-            </a:solidFill>
-          </a:ln>
-        </p:spPr>
-        <p:style>
-          <a:lnRef idx="1">
-            <a:schemeClr val="accent1"/>
-          </a:lnRef>
-          <a:fillRef idx="3">
-            <a:schemeClr val="accent1"/>
-          </a:fillRef>
-          <a:effectRef idx="2">
-            <a:schemeClr val="accent1"/>
-          </a:effectRef>
-          <a:fontRef idx="minor">
-            <a:schemeClr val="lt1"/>
-          </a:fontRef>
-        </p:style>
-        <p:txBody>
-          <a:bodyPr rtlCol="0" anchor="ctr" wrap="square"/>
-          <a:lstStyle/>
-          <a:p>
-            <a:pPr algn="ctr"/>
-            <a:r>
-              <a:rPr sz="950" b="0">
-                <a:solidFill>
-                  <a:srgbClr val="FFFFFF"/>
-                </a:solidFill>
-              </a:rPr>
-              <a:t>consistency.py
-run()
-[not yet impl.]</a:t>
-            </a:r>
-          </a:p>
-        </p:txBody>
-      </p:sp>
-      <p:cxnSp>
-        <p:nvCxnSpPr>
-          <p:cNvPr id="49" name="Arrow 49"/>
-          <p:cNvCxnSpPr/>
-          <p:nvPr/>
-        </p:nvCxnSpPr>
-        <p:spPr>
-          <a:xfrm>
-            <a:off x="5715000" y="5486400"/>
-            <a:ext cx="11402568" cy="411480"/>
-          </a:xfrm>
-          <a:prstGeom prst="line">
-            <a:avLst/>
-          </a:prstGeom>
-          <a:ln w="19050">
-            <a:solidFill>
-              <a:srgbClr val="404040"/>
-            </a:solidFill>
-            <a:tailEnd type="arrow" w="med" len="med"/>
-          </a:ln>
-        </p:spPr>
-      </p:cxnSp>
-      <p:sp>
-        <p:nvSpPr>
-          <p:cNvPr id="50" name="Rounded Rectangle 49"/>
-          <p:cNvSpPr/>
-          <p:nvPr/>
-        </p:nvSpPr>
-        <p:spPr>
-          <a:xfrm>
-            <a:off x="256032" y="6995160"/>
-            <a:ext cx="1828800" cy="868680"/>
+            <a:off x="3589020" y="10515600"/>
+            <a:ext cx="5394960" cy="2487168"/>
           </a:xfrm>
           <a:prstGeom prst="roundRect">
             <a:avLst/>
@@ -5099,30 +4874,32 @@
           <a:p>
             <a:pPr algn="ctr"/>
             <a:r>
-              <a:rPr sz="950" b="0">
+              <a:rPr sz="1800" b="0">
                 <a:solidFill>
                   <a:srgbClr val="FFFFFF"/>
                 </a:solidFill>
               </a:rPr>
               <a:t>landcover_process()
-· read MODIS / transitions
-· regrid (uraster)
-· split PFTs
-· write → LtData</a:t>
+· tools.init_worker_logging()
+· tools.redirect_uraster_logs()
+· landgen_io.write_mesh_to_geojson()
+· lc_rs.use_lc_rs()
+· lc_rs.read_to_geotiff()
+· landgen_io.regrid_to_mesh()</a:t>
             </a:r>
           </a:p>
         </p:txBody>
       </p:sp>
       <p:cxnSp>
         <p:nvCxnSpPr>
-          <p:cNvPr id="51" name="Arrow 51"/>
+          <p:cNvPr id="45" name="Arrow 45"/>
           <p:cNvCxnSpPr/>
           <p:nvPr/>
         </p:nvCxnSpPr>
         <p:spPr>
           <a:xfrm>
-            <a:off x="1170432" y="6583680"/>
-            <a:ext cx="1" cy="411480"/>
+            <a:off x="3191259" y="10012680"/>
+            <a:ext cx="3095241" cy="502920"/>
           </a:xfrm>
           <a:prstGeom prst="line">
             <a:avLst/>
@@ -5137,14 +4914,14 @@
       </p:cxnSp>
       <p:sp>
         <p:nvSpPr>
-          <p:cNvPr id="52" name="Rounded Rectangle 51"/>
+          <p:cNvPr id="46" name="Rounded Rectangle 45"/>
           <p:cNvSpPr/>
           <p:nvPr/>
         </p:nvSpPr>
         <p:spPr>
           <a:xfrm>
-            <a:off x="10222992" y="6995160"/>
-            <a:ext cx="1828800" cy="868680"/>
+            <a:off x="9304020" y="10515600"/>
+            <a:ext cx="5394960" cy="2487168"/>
           </a:xfrm>
           <a:prstGeom prst="roundRect">
             <a:avLst/>
@@ -5178,30 +4955,29 @@
           <a:p>
             <a:pPr algn="ctr"/>
             <a:r>
-              <a:rPr sz="950" b="0">
+              <a:rPr sz="1800" b="0">
                 <a:solidFill>
                   <a:srgbClr val="FFFFFF"/>
                 </a:solidFill>
               </a:rPr>
               <a:t>harvest_process()
-· read LUH2 harvest
-· read HYDE grazing
-· regrid (uraster)
-· write → LtData</a:t>
+· landgen_io.read_luh2_harvest()
+· landgen_io.read_hyde_grazing()
+· landgen_io.regrid_to_landgen_grid()</a:t>
             </a:r>
           </a:p>
         </p:txBody>
       </p:sp>
       <p:cxnSp>
         <p:nvCxnSpPr>
-          <p:cNvPr id="53" name="Arrow 53"/>
+          <p:cNvPr id="47" name="Arrow 47"/>
           <p:cNvCxnSpPr/>
           <p:nvPr/>
         </p:nvCxnSpPr>
         <p:spPr>
-          <a:xfrm>
-            <a:off x="11137392" y="6583680"/>
-            <a:ext cx="1" cy="411480"/>
+          <a:xfrm flipH="1">
+            <a:off x="12001500" y="10012680"/>
+            <a:ext cx="1110994" cy="502920"/>
           </a:xfrm>
           <a:prstGeom prst="line">
             <a:avLst/>
@@ -5214,292 +4990,34 @@
           </a:ln>
         </p:spPr>
       </p:cxnSp>
-      <p:sp>
-        <p:nvSpPr>
-          <p:cNvPr id="54" name="Rounded Rectangle 53"/>
-          <p:cNvSpPr/>
-          <p:nvPr/>
-        </p:nvSpPr>
-        <p:spPr>
-          <a:xfrm>
-            <a:off x="1234440" y="8275320"/>
-            <a:ext cx="3017520" cy="777240"/>
-          </a:xfrm>
-          <a:prstGeom prst="roundRect">
-            <a:avLst/>
-          </a:prstGeom>
-          <a:solidFill>
-            <a:srgbClr val="ED7D31"/>
-          </a:solidFill>
-          <a:ln w="9525">
-            <a:solidFill>
-              <a:srgbClr val="FFFFFF"/>
-            </a:solidFill>
-          </a:ln>
-        </p:spPr>
-        <p:style>
-          <a:lnRef idx="1">
-            <a:schemeClr val="accent1"/>
-          </a:lnRef>
-          <a:fillRef idx="3">
-            <a:schemeClr val="accent1"/>
-          </a:fillRef>
-          <a:effectRef idx="2">
-            <a:schemeClr val="accent1"/>
-          </a:effectRef>
-          <a:fontRef idx="minor">
-            <a:schemeClr val="lt1"/>
-          </a:fontRef>
-        </p:style>
-        <p:txBody>
-          <a:bodyPr rtlCol="0" anchor="ctr" wrap="square"/>
-          <a:lstStyle/>
-          <a:p>
-            <a:pPr algn="ctr"/>
-            <a:r>
-              <a:rPr sz="950" b="0">
-                <a:solidFill>
-                  <a:srgbClr val="FFFFFF"/>
-                </a:solidFill>
-              </a:rPr>
-              <a:t>read_luh2_harvest()
-LUH2 transitions.nc
-→ harvest arrays</a:t>
-            </a:r>
-          </a:p>
-        </p:txBody>
-      </p:sp>
-      <p:sp>
-        <p:nvSpPr>
-          <p:cNvPr id="55" name="Rounded Rectangle 54"/>
-          <p:cNvSpPr/>
-          <p:nvPr/>
-        </p:nvSpPr>
-        <p:spPr>
-          <a:xfrm>
-            <a:off x="4434840" y="8275320"/>
-            <a:ext cx="3017520" cy="777240"/>
-          </a:xfrm>
-          <a:prstGeom prst="roundRect">
-            <a:avLst/>
-          </a:prstGeom>
-          <a:solidFill>
-            <a:srgbClr val="ED7D31"/>
-          </a:solidFill>
-          <a:ln w="9525">
-            <a:solidFill>
-              <a:srgbClr val="FFFFFF"/>
-            </a:solidFill>
-          </a:ln>
-        </p:spPr>
-        <p:style>
-          <a:lnRef idx="1">
-            <a:schemeClr val="accent1"/>
-          </a:lnRef>
-          <a:fillRef idx="3">
-            <a:schemeClr val="accent1"/>
-          </a:fillRef>
-          <a:effectRef idx="2">
-            <a:schemeClr val="accent1"/>
-          </a:effectRef>
-          <a:fontRef idx="minor">
-            <a:schemeClr val="lt1"/>
-          </a:fontRef>
-        </p:style>
-        <p:txBody>
-          <a:bodyPr rtlCol="0" anchor="ctr" wrap="square"/>
-          <a:lstStyle/>
-          <a:p>
-            <a:pPr algn="ctr"/>
-            <a:r>
-              <a:rPr sz="950" b="0">
-                <a:solidFill>
-                  <a:srgbClr val="FFFFFF"/>
-                </a:solidFill>
-              </a:rPr>
-              <a:t>read_hyde_grazing()
-HYDE3.5 .nc files
-→ grazing arrays</a:t>
-            </a:r>
-          </a:p>
-        </p:txBody>
-      </p:sp>
-      <p:sp>
-        <p:nvSpPr>
-          <p:cNvPr id="56" name="Rounded Rectangle 55"/>
-          <p:cNvSpPr/>
-          <p:nvPr/>
-        </p:nvSpPr>
-        <p:spPr>
-          <a:xfrm>
-            <a:off x="7635240" y="8275320"/>
-            <a:ext cx="3017520" cy="777240"/>
-          </a:xfrm>
-          <a:prstGeom prst="roundRect">
-            <a:avLst/>
-          </a:prstGeom>
-          <a:solidFill>
-            <a:srgbClr val="ED7D31"/>
-          </a:solidFill>
-          <a:ln w="9525">
-            <a:solidFill>
-              <a:srgbClr val="FFFFFF"/>
-            </a:solidFill>
-          </a:ln>
-        </p:spPr>
-        <p:style>
-          <a:lnRef idx="1">
-            <a:schemeClr val="accent1"/>
-          </a:lnRef>
-          <a:fillRef idx="3">
-            <a:schemeClr val="accent1"/>
-          </a:fillRef>
-          <a:effectRef idx="2">
-            <a:schemeClr val="accent1"/>
-          </a:effectRef>
-          <a:fontRef idx="minor">
-            <a:schemeClr val="lt1"/>
-          </a:fontRef>
-        </p:style>
-        <p:txBody>
-          <a:bodyPr rtlCol="0" anchor="ctr" wrap="square"/>
-          <a:lstStyle/>
-          <a:p>
-            <a:pPr algn="ctr"/>
-            <a:r>
-              <a:rPr sz="950" b="0">
-                <a:solidFill>
-                  <a:srgbClr val="FFFFFF"/>
-                </a:solidFill>
-              </a:rPr>
-              <a:t>write_latlon_to_geotiff()
-2D lat-lon slice
-→ GeoTIFF</a:t>
-            </a:r>
-          </a:p>
-        </p:txBody>
-      </p:sp>
-      <p:sp>
-        <p:nvSpPr>
-          <p:cNvPr id="57" name="Rounded Rectangle 56"/>
-          <p:cNvSpPr/>
-          <p:nvPr/>
-        </p:nvSpPr>
-        <p:spPr>
-          <a:xfrm>
-            <a:off x="10835640" y="8275320"/>
-            <a:ext cx="3017520" cy="777240"/>
-          </a:xfrm>
-          <a:prstGeom prst="roundRect">
-            <a:avLst/>
-          </a:prstGeom>
-          <a:solidFill>
-            <a:srgbClr val="ED7D31"/>
-          </a:solidFill>
-          <a:ln w="9525">
-            <a:solidFill>
-              <a:srgbClr val="FFFFFF"/>
-            </a:solidFill>
-          </a:ln>
-        </p:spPr>
-        <p:style>
-          <a:lnRef idx="1">
-            <a:schemeClr val="accent1"/>
-          </a:lnRef>
-          <a:fillRef idx="3">
-            <a:schemeClr val="accent1"/>
-          </a:fillRef>
-          <a:effectRef idx="2">
-            <a:schemeClr val="accent1"/>
-          </a:effectRef>
-          <a:fontRef idx="minor">
-            <a:schemeClr val="lt1"/>
-          </a:fontRef>
-        </p:style>
-        <p:txBody>
-          <a:bodyPr rtlCol="0" anchor="ctr" wrap="square"/>
-          <a:lstStyle/>
-          <a:p>
-            <a:pPr algn="ctr"/>
-            <a:r>
-              <a:rPr sz="950" b="0">
-                <a:solidFill>
-                  <a:srgbClr val="FFFFFF"/>
-                </a:solidFill>
-              </a:rPr>
-              <a:t>write_chunk_mesh_
-to_geojson()
-HEALPix cells → GeoJSON</a:t>
-            </a:r>
-          </a:p>
-        </p:txBody>
-      </p:sp>
-      <p:sp>
-        <p:nvSpPr>
-          <p:cNvPr id="58" name="Rounded Rectangle 57"/>
-          <p:cNvSpPr/>
-          <p:nvPr/>
-        </p:nvSpPr>
-        <p:spPr>
-          <a:xfrm>
-            <a:off x="14036040" y="8275320"/>
-            <a:ext cx="3017520" cy="777240"/>
-          </a:xfrm>
-          <a:prstGeom prst="roundRect">
-            <a:avLst/>
-          </a:prstGeom>
-          <a:solidFill>
-            <a:srgbClr val="ED7D31"/>
-          </a:solidFill>
-          <a:ln w="9525">
-            <a:solidFill>
-              <a:srgbClr val="FFFFFF"/>
-            </a:solidFill>
-          </a:ln>
-        </p:spPr>
-        <p:style>
-          <a:lnRef idx="1">
-            <a:schemeClr val="accent1"/>
-          </a:lnRef>
-          <a:fillRef idx="3">
-            <a:schemeClr val="accent1"/>
-          </a:fillRef>
-          <a:effectRef idx="2">
-            <a:schemeClr val="accent1"/>
-          </a:effectRef>
-          <a:fontRef idx="minor">
-            <a:schemeClr val="lt1"/>
-          </a:fontRef>
-        </p:style>
-        <p:txBody>
-          <a:bodyPr rtlCol="0" anchor="ctr" wrap="square"/>
-          <a:lstStyle/>
-          <a:p>
-            <a:pPr algn="ctr"/>
-            <a:r>
-              <a:rPr sz="950" b="0">
-                <a:solidFill>
-                  <a:srgbClr val="FFFFFF"/>
-                </a:solidFill>
-              </a:rPr>
-              <a:t>regrid_to_landgen_
-grid()
-GeoTIFF + GeoJSON
-→ URaster → 1D array</a:t>
-            </a:r>
-          </a:p>
-        </p:txBody>
-      </p:sp>
-      <p:sp>
-        <p:nvSpPr>
-          <p:cNvPr id="59" name="TextBox 58"/>
+    </p:spTree>
+  </p:cSld>
+  <p:clrMapOvr>
+    <a:masterClrMapping/>
+  </p:clrMapOvr>
+</p:sld>
+</file>
+
+<file path=ppt/slides/slide2.xml><?xml version="1.0" encoding="utf-8"?>
+<p:sld xmlns:a="http://schemas.openxmlformats.org/drawingml/2006/main" xmlns:p="http://schemas.openxmlformats.org/presentationml/2006/main" xmlns:r="http://schemas.openxmlformats.org/officeDocument/2006/relationships">
+  <p:cSld>
+    <p:spTree>
+      <p:nvGrpSpPr>
+        <p:cNvPr id="1" name=""/>
+        <p:cNvGrpSpPr/>
+        <p:nvPr/>
+      </p:nvGrpSpPr>
+      <p:grpSpPr/>
+      <p:sp>
+        <p:nvSpPr>
+          <p:cNvPr id="2" name="TextBox 1"/>
           <p:cNvSpPr txBox="1"/>
           <p:nvPr/>
         </p:nvSpPr>
         <p:spPr>
           <a:xfrm>
-            <a:off x="1143000" y="8001000"/>
-            <a:ext cx="3657600" cy="228600"/>
+            <a:off x="182880" y="91440"/>
+            <a:ext cx="17922240" cy="457200"/>
           </a:xfrm>
           <a:prstGeom prst="rect">
             <a:avLst/>
@@ -5512,61 +5030,520 @@
           </a:bodyPr>
           <a:lstStyle/>
           <a:p>
-            <a:r>
-              <a:rPr sz="1100" b="1">
+            <a:pPr algn="ctr"/>
+            <a:r>
+              <a:rPr sz="2600" b="1">
                 <a:solidFill>
                   <a:srgbClr val="ED7D31"/>
                 </a:solidFill>
               </a:rPr>
-              <a:t>landgen_io.py  –  I/O utilities</a:t>
-            </a:r>
-          </a:p>
-        </p:txBody>
-      </p:sp>
-      <p:cxnSp>
-        <p:nvCxnSpPr>
-          <p:cNvPr id="60" name="Arrow 60"/>
-          <p:cNvCxnSpPr/>
+              <a:t>landgen_io.py – Function Summary</a:t>
+            </a:r>
+          </a:p>
+        </p:txBody>
+      </p:sp>
+      <p:sp>
+        <p:nvSpPr>
+          <p:cNvPr id="3" name="TextBox 2"/>
+          <p:cNvSpPr txBox="1"/>
           <p:nvPr/>
-        </p:nvCxnSpPr>
-        <p:spPr>
-          <a:xfrm>
-            <a:off x="1170432" y="7863840"/>
-            <a:ext cx="7607808" cy="411480"/>
-          </a:xfrm>
-          <a:prstGeom prst="line">
-            <a:avLst/>
-          </a:prstGeom>
-          <a:ln w="19050">
-            <a:solidFill>
-              <a:srgbClr val="404040"/>
-            </a:solidFill>
-            <a:tailEnd type="arrow" w="med" len="med"/>
-          </a:ln>
-        </p:spPr>
-      </p:cxnSp>
-      <p:cxnSp>
-        <p:nvCxnSpPr>
-          <p:cNvPr id="61" name="Arrow 61"/>
-          <p:cNvCxnSpPr/>
+        </p:nvSpPr>
+        <p:spPr>
+          <a:xfrm>
+            <a:off x="274320" y="594360"/>
+            <a:ext cx="17556480" cy="320040"/>
+          </a:xfrm>
+          <a:prstGeom prst="rect">
+            <a:avLst/>
+          </a:prstGeom>
+          <a:noFill/>
+        </p:spPr>
+        <p:txBody>
+          <a:bodyPr wrap="none">
+            <a:spAutoFit/>
+          </a:bodyPr>
+          <a:lstStyle/>
+          <a:p>
+            <a:r>
+              <a:rPr sz="1800">
+                <a:solidFill>
+                  <a:srgbClr val="000000"/>
+                </a:solidFill>
+              </a:rPr>
+              <a:t>Auto-parsed from src/landgen/landgen_io.py</a:t>
+            </a:r>
+          </a:p>
+        </p:txBody>
+      </p:sp>
+      <p:sp>
+        <p:nvSpPr>
+          <p:cNvPr id="4" name="TextBox 3"/>
+          <p:cNvSpPr txBox="1"/>
           <p:nvPr/>
-        </p:nvCxnSpPr>
-        <p:spPr>
-          <a:xfrm flipH="1">
-            <a:off x="8778240" y="7863840"/>
-            <a:ext cx="2359152" cy="411480"/>
-          </a:xfrm>
-          <a:prstGeom prst="line">
-            <a:avLst/>
-          </a:prstGeom>
-          <a:ln w="19050">
-            <a:solidFill>
-              <a:srgbClr val="404040"/>
-            </a:solidFill>
-            <a:tailEnd type="arrow" w="med" len="med"/>
-          </a:ln>
-        </p:spPr>
-      </p:cxnSp>
+        </p:nvSpPr>
+        <p:spPr>
+          <a:xfrm>
+            <a:off x="365760" y="1005840"/>
+            <a:ext cx="8595360" cy="11338560"/>
+          </a:xfrm>
+          <a:prstGeom prst="rect">
+            <a:avLst/>
+          </a:prstGeom>
+          <a:noFill/>
+        </p:spPr>
+        <p:txBody>
+          <a:bodyPr wrap="square">
+            <a:spAutoFit/>
+          </a:bodyPr>
+          <a:lstStyle/>
+          <a:p>
+            <a:pPr/>
+            <a:r>
+              <a:rPr sz="1800"/>
+              <a:t>set_decomp_cell_idx_ll_limits()  –  Populate chunk_indices and chunk_ll_limits in-place from the domain NetCDF.</a:t>
+            </a:r>
+          </a:p>
+          <a:p>
+            <a:pPr/>
+            <a:r>
+              <a:rPr sz="1800"/>
+              <a:t>load_mesh_nc()  –  Load HEALPix mesh data from a NetCDF domain file.</a:t>
+            </a:r>
+          </a:p>
+          <a:p>
+            <a:pPr/>
+            <a:r>
+              <a:rPr sz="1800"/>
+              <a:t>calc_ll_limits()  –  Calculate and return a list of tuples (min_lat, max_lat, min_lon, max_lon)</a:t>
+            </a:r>
+          </a:p>
+          <a:p>
+            <a:pPr/>
+            <a:r>
+              <a:rPr sz="1800"/>
+              <a:t>get_modis_tile_idxs_ll()  –  Get the MODIS tile indices for a lat/lon bounding box.</a:t>
+            </a:r>
+          </a:p>
+          <a:p>
+            <a:pPr/>
+            <a:r>
+              <a:rPr sz="1800"/>
+              <a:t>get_sds_string()  –  Scans HDF subdatasets and returns a pyModis SDS string.</a:t>
+            </a:r>
+          </a:p>
+          <a:p>
+            <a:pPr/>
+            <a:r>
+              <a:rPr sz="1800"/>
+              <a:t>read_modis_ll_to_geotiff()  –  Download MODIS HDF tiles for a given year, mosaic them, and convert each</a:t>
+            </a:r>
+          </a:p>
+          <a:p>
+            <a:pPr/>
+            <a:r>
+              <a:rPr sz="1800"/>
+              <a:t>read_netcdf_ll()  –  Read variables from a NetCDF file for a given year.</a:t>
+            </a:r>
+          </a:p>
+          <a:p>
+            <a:pPr/>
+            <a:r>
+              <a:rPr sz="1800"/>
+              <a:t>read_luh2_harvest()  –  Read LUH2 harvest variables for a given year.</a:t>
+            </a:r>
+          </a:p>
+        </p:txBody>
+      </p:sp>
+      <p:sp>
+        <p:nvSpPr>
+          <p:cNvPr id="5" name="TextBox 4"/>
+          <p:cNvSpPr txBox="1"/>
+          <p:nvPr/>
+        </p:nvSpPr>
+        <p:spPr>
+          <a:xfrm>
+            <a:off x="9326880" y="1005840"/>
+            <a:ext cx="8595360" cy="11338560"/>
+          </a:xfrm>
+          <a:prstGeom prst="rect">
+            <a:avLst/>
+          </a:prstGeom>
+          <a:noFill/>
+        </p:spPr>
+        <p:txBody>
+          <a:bodyPr wrap="square">
+            <a:spAutoFit/>
+          </a:bodyPr>
+          <a:lstStyle/>
+          <a:p>
+            <a:pPr/>
+            <a:r>
+              <a:rPr sz="1800"/>
+              <a:t>read_hyde_grazing()  –  Read HYDE3.5 grazing data for a given year.</a:t>
+            </a:r>
+          </a:p>
+          <a:p>
+            <a:pPr/>
+            <a:r>
+              <a:rPr sz="1800"/>
+              <a:t>write_latlon_to_geotiff()  –  Slice a 2D (lat, lon) source array to a lat-lon bounding box and write</a:t>
+            </a:r>
+          </a:p>
+          <a:p>
+            <a:pPr/>
+            <a:r>
+              <a:rPr sz="1800"/>
+              <a:t>write_mesh_to_geojson()  –  Write mesh cells from a GridData object to a GeoJSON file.</a:t>
+            </a:r>
+          </a:p>
+          <a:p>
+            <a:pPr/>
+            <a:r>
+              <a:rPr sz="1800"/>
+              <a:t>write_chunk_mesh_to_geojson()  –  Filter the global HEALPix mesh DataFrame to only the cells in cell_ids</a:t>
+            </a:r>
+          </a:p>
+          <a:p>
+            <a:pPr/>
+            <a:r>
+              <a:rPr sz="1800"/>
+              <a:t>regrid_to_landgen_grid()  –  Regrid a single 2D source variable onto the landgen HEALPix grid cells</a:t>
+            </a:r>
+          </a:p>
+          <a:p>
+            <a:pPr/>
+            <a:r>
+              <a:rPr sz="1800"/>
+              <a:t>regrid_to_mesh()  –  Regrid a single raster variable onto the landgen mesh cells for one chunk,</a:t>
+            </a:r>
+          </a:p>
+          <a:p>
+            <a:pPr/>
+            <a:r>
+              <a:rPr sz="1800"/>
+              <a:t>write_module_netcdf()  –  Write a NetCDF file containing grid geometry from out_grid_data plus</a:t>
+            </a:r>
+          </a:p>
+          <a:p>
+            <a:pPr/>
+            <a:r>
+              <a:rPr sz="1800"/>
+              <a:t>get_chunk_cell_ids()  –  Determine the landgen grid cell ids that intersect each lat-lon chunk.</a:t>
+            </a:r>
+          </a:p>
+        </p:txBody>
+      </p:sp>
+    </p:spTree>
+  </p:cSld>
+  <p:clrMapOvr>
+    <a:masterClrMapping/>
+  </p:clrMapOvr>
+</p:sld>
+</file>
+
+<file path=ppt/slides/slide3.xml><?xml version="1.0" encoding="utf-8"?>
+<p:sld xmlns:a="http://schemas.openxmlformats.org/drawingml/2006/main" xmlns:p="http://schemas.openxmlformats.org/presentationml/2006/main" xmlns:r="http://schemas.openxmlformats.org/officeDocument/2006/relationships">
+  <p:cSld>
+    <p:spTree>
+      <p:nvGrpSpPr>
+        <p:cNvPr id="1" name=""/>
+        <p:cNvGrpSpPr/>
+        <p:nvPr/>
+      </p:nvGrpSpPr>
+      <p:grpSpPr/>
+      <p:sp>
+        <p:nvSpPr>
+          <p:cNvPr id="2" name="TextBox 1"/>
+          <p:cNvSpPr txBox="1"/>
+          <p:nvPr/>
+        </p:nvSpPr>
+        <p:spPr>
+          <a:xfrm>
+            <a:off x="182880" y="91440"/>
+            <a:ext cx="17922240" cy="457200"/>
+          </a:xfrm>
+          <a:prstGeom prst="rect">
+            <a:avLst/>
+          </a:prstGeom>
+          <a:noFill/>
+        </p:spPr>
+        <p:txBody>
+          <a:bodyPr wrap="none">
+            <a:spAutoFit/>
+          </a:bodyPr>
+          <a:lstStyle/>
+          <a:p>
+            <a:pPr algn="ctr"/>
+            <a:r>
+              <a:rPr sz="2600" b="1">
+                <a:solidFill>
+                  <a:srgbClr val="2E75B6"/>
+                </a:solidFill>
+              </a:rPr>
+              <a:t>tools.py – Function Summary</a:t>
+            </a:r>
+          </a:p>
+        </p:txBody>
+      </p:sp>
+      <p:sp>
+        <p:nvSpPr>
+          <p:cNvPr id="3" name="TextBox 2"/>
+          <p:cNvSpPr txBox="1"/>
+          <p:nvPr/>
+        </p:nvSpPr>
+        <p:spPr>
+          <a:xfrm>
+            <a:off x="274320" y="594360"/>
+            <a:ext cx="17556480" cy="320040"/>
+          </a:xfrm>
+          <a:prstGeom prst="rect">
+            <a:avLst/>
+          </a:prstGeom>
+          <a:noFill/>
+        </p:spPr>
+        <p:txBody>
+          <a:bodyPr wrap="none">
+            <a:spAutoFit/>
+          </a:bodyPr>
+          <a:lstStyle/>
+          <a:p>
+            <a:r>
+              <a:rPr sz="1800">
+                <a:solidFill>
+                  <a:srgbClr val="000000"/>
+                </a:solidFill>
+              </a:rPr>
+              <a:t>Auto-parsed from src/landgen/tools.py</a:t>
+            </a:r>
+          </a:p>
+        </p:txBody>
+      </p:sp>
+      <p:sp>
+        <p:nvSpPr>
+          <p:cNvPr id="4" name="TextBox 3"/>
+          <p:cNvSpPr txBox="1"/>
+          <p:nvPr/>
+        </p:nvSpPr>
+        <p:spPr>
+          <a:xfrm>
+            <a:off x="365760" y="1005840"/>
+            <a:ext cx="8595360" cy="11338560"/>
+          </a:xfrm>
+          <a:prstGeom prst="rect">
+            <a:avLst/>
+          </a:prstGeom>
+          <a:noFill/>
+        </p:spPr>
+        <p:txBody>
+          <a:bodyPr wrap="square">
+            <a:spAutoFit/>
+          </a:bodyPr>
+          <a:lstStyle/>
+          <a:p>
+            <a:pPr/>
+            <a:r>
+              <a:rPr sz="1800"/>
+              <a:t>setup_logger()  –  Configure a named logger to write to log_path and to stdout.</a:t>
+            </a:r>
+          </a:p>
+          <a:p>
+            <a:pPr/>
+            <a:r>
+              <a:rPr sz="1800"/>
+              <a:t>init_worker_logging()  –  Attach a FileHandler (append mode) to the named logger inside a worker</a:t>
+            </a:r>
+          </a:p>
+          <a:p>
+            <a:pPr/>
+            <a:r>
+              <a:rPr sz="1800"/>
+              <a:t>redirect_uraster_logs()  –  Redirect uraster's auto-created log files from the process CWD to out_path.</a:t>
+            </a:r>
+          </a:p>
+        </p:txBody>
+      </p:sp>
+      <p:sp>
+        <p:nvSpPr>
+          <p:cNvPr id="5" name="TextBox 4"/>
+          <p:cNvSpPr txBox="1"/>
+          <p:nvPr/>
+        </p:nvSpPr>
+        <p:spPr>
+          <a:xfrm>
+            <a:off x="9326880" y="1005840"/>
+            <a:ext cx="8595360" cy="11338560"/>
+          </a:xfrm>
+          <a:prstGeom prst="rect">
+            <a:avLst/>
+          </a:prstGeom>
+          <a:noFill/>
+        </p:spPr>
+        <p:txBody>
+          <a:bodyPr wrap="square">
+            <a:spAutoFit/>
+          </a:bodyPr>
+          <a:lstStyle/>
+          <a:p>
+            <a:pPr/>
+            <a:r>
+              <a:rPr sz="1800"/>
+              <a:t>parse_cpu_env()  –  Return the integer value of an environment variable, or None if unset or</a:t>
+            </a:r>
+          </a:p>
+          <a:p>
+            <a:pPr/>
+            <a:r>
+              <a:rPr sz="1800"/>
+              <a:t>monitor_cluster_resources()  –  Periodically logs aggregated CPU and memory usage of the entire process tree.</a:t>
+            </a:r>
+          </a:p>
+        </p:txBody>
+      </p:sp>
+    </p:spTree>
+  </p:cSld>
+  <p:clrMapOvr>
+    <a:masterClrMapping/>
+  </p:clrMapOvr>
+</p:sld>
+</file>
+
+<file path=ppt/slides/slide4.xml><?xml version="1.0" encoding="utf-8"?>
+<p:sld xmlns:a="http://schemas.openxmlformats.org/drawingml/2006/main" xmlns:p="http://schemas.openxmlformats.org/presentationml/2006/main" xmlns:r="http://schemas.openxmlformats.org/officeDocument/2006/relationships">
+  <p:cSld>
+    <p:spTree>
+      <p:nvGrpSpPr>
+        <p:cNvPr id="1" name=""/>
+        <p:cNvGrpSpPr/>
+        <p:nvPr/>
+      </p:nvGrpSpPr>
+      <p:grpSpPr/>
+      <p:sp>
+        <p:nvSpPr>
+          <p:cNvPr id="2" name="TextBox 1"/>
+          <p:cNvSpPr txBox="1"/>
+          <p:nvPr/>
+        </p:nvSpPr>
+        <p:spPr>
+          <a:xfrm>
+            <a:off x="182880" y="91440"/>
+            <a:ext cx="17922240" cy="457200"/>
+          </a:xfrm>
+          <a:prstGeom prst="rect">
+            <a:avLst/>
+          </a:prstGeom>
+          <a:noFill/>
+        </p:spPr>
+        <p:txBody>
+          <a:bodyPr wrap="none">
+            <a:spAutoFit/>
+          </a:bodyPr>
+          <a:lstStyle/>
+          <a:p>
+            <a:pPr algn="ctr"/>
+            <a:r>
+              <a:rPr sz="2600" b="1">
+                <a:solidFill>
+                  <a:srgbClr val="1F497D"/>
+                </a:solidFill>
+              </a:rPr>
+              <a:t>plot_landgen.py – Function Summary</a:t>
+            </a:r>
+          </a:p>
+        </p:txBody>
+      </p:sp>
+      <p:sp>
+        <p:nvSpPr>
+          <p:cNvPr id="3" name="TextBox 2"/>
+          <p:cNvSpPr txBox="1"/>
+          <p:nvPr/>
+        </p:nvSpPr>
+        <p:spPr>
+          <a:xfrm>
+            <a:off x="274320" y="594360"/>
+            <a:ext cx="17556480" cy="320040"/>
+          </a:xfrm>
+          <a:prstGeom prst="rect">
+            <a:avLst/>
+          </a:prstGeom>
+          <a:noFill/>
+        </p:spPr>
+        <p:txBody>
+          <a:bodyPr wrap="none">
+            <a:spAutoFit/>
+          </a:bodyPr>
+          <a:lstStyle/>
+          <a:p>
+            <a:r>
+              <a:rPr sz="1800">
+                <a:solidFill>
+                  <a:srgbClr val="000000"/>
+                </a:solidFill>
+              </a:rPr>
+              <a:t>Auto-parsed from src/landgen/plot_landgen.py</a:t>
+            </a:r>
+          </a:p>
+        </p:txBody>
+      </p:sp>
+      <p:sp>
+        <p:nvSpPr>
+          <p:cNvPr id="4" name="TextBox 3"/>
+          <p:cNvSpPr txBox="1"/>
+          <p:nvPr/>
+        </p:nvSpPr>
+        <p:spPr>
+          <a:xfrm>
+            <a:off x="365760" y="1005840"/>
+            <a:ext cx="8595360" cy="11338560"/>
+          </a:xfrm>
+          <a:prstGeom prst="rect">
+            <a:avLst/>
+          </a:prstGeom>
+          <a:noFill/>
+        </p:spPr>
+        <p:txBody>
+          <a:bodyPr wrap="square">
+            <a:spAutoFit/>
+          </a:bodyPr>
+          <a:lstStyle/>
+          <a:p>
+            <a:pPr/>
+            <a:r>
+              <a:rPr sz="1800"/>
+              <a:t>plot_module_netcdf()  –  Plot one or more variables from a NetCDF file written by landgen.</a:t>
+            </a:r>
+          </a:p>
+        </p:txBody>
+      </p:sp>
+      <p:sp>
+        <p:nvSpPr>
+          <p:cNvPr id="5" name="TextBox 4"/>
+          <p:cNvSpPr txBox="1"/>
+          <p:nvPr/>
+        </p:nvSpPr>
+        <p:spPr>
+          <a:xfrm>
+            <a:off x="9326880" y="1005840"/>
+            <a:ext cx="8595360" cy="11338560"/>
+          </a:xfrm>
+          <a:prstGeom prst="rect">
+            <a:avLst/>
+          </a:prstGeom>
+          <a:noFill/>
+        </p:spPr>
+        <p:txBody>
+          <a:bodyPr wrap="square">
+            <a:spAutoFit/>
+          </a:bodyPr>
+          <a:lstStyle/>
+          <a:p>
+            <a:pPr/>
+            <a:r>
+              <a:rPr sz="1800"/>
+              <a:t>main()  –  CLI entry point for standalone plotting.</a:t>
+            </a:r>
+          </a:p>
+        </p:txBody>
+      </p:sp>
     </p:spTree>
   </p:cSld>
   <p:clrMapOvr>
